--- a/06_relazioni_e_parametri/Slides/05_modello-fisico.pptx
+++ b/06_relazioni_e_parametri/Slides/05_modello-fisico.pptx
@@ -4,12 +4,12 @@
   <p:sldMasterIdLst>
     <p:sldMasterId id="2147483648" r:id="rId1"/>
   </p:sldMasterIdLst>
+  <p:sldIdLst>
+    <p:sldId id="256" r:id="rId2"/>
+  </p:sldIdLst>
   <p:notesMasterIdLst>
     <p:notesMasterId r:id="rId3"/>
   </p:notesMasterIdLst>
-  <p:sldIdLst>
-    <p:sldId id="256" r:id="rId2"/>
-  </p:sldIdLst>
   <p:sldSz cx="12192000" cy="6858000"/>
   <p:notesSz cx="6858000" cy="12192000"/>
   <p:defaultTextStyle>
@@ -104,11 +104,6 @@
       </a:defRPr>
     </a:lvl9pPr>
   </p:defaultTextStyle>
-  <p:extLst>
-    <p:ext uri="{EFAFB233-063F-42B5-8137-9DF3F51BA10A}">
-      <p15:sldGuideLst xmlns:p15="http://schemas.microsoft.com/office/powerpoint/2012/main"/>
-    </p:ext>
-  </p:extLst>
 </p:presentation>
 </file>
 
@@ -134,10 +129,234 @@
           <a:chExt cx="0" cy="0"/>
         </a:xfrm>
       </p:grpSpPr>
+      <p:sp>
+        <p:nvSpPr>
+          <p:cNvPr id="2" name="Header Placeholder 1"/>
+          <p:cNvSpPr>
+            <a:spLocks noGrp="1"/>
+          </p:cNvSpPr>
+          <p:nvPr>
+            <p:ph type="hdr" sz="quarter"/>
+          </p:nvPr>
+        </p:nvSpPr>
+        <p:spPr>
+          <a:xfrm>
+            <a:off x="0" y="0"/>
+            <a:ext cx="2971800" cy="458788"/>
+          </a:xfrm>
+          <a:prstGeom prst="rect">
+            <a:avLst/>
+          </a:prstGeom>
+        </p:spPr>
+        <p:txBody>
+          <a:bodyPr vert="horz" lIns="91440" tIns="45720" rIns="91440" bIns="45720" rtlCol="0"/>
+          <a:lstStyle>
+            <a:lvl1pPr algn="l">
+              <a:defRPr sz="1200"/>
+            </a:lvl1pPr>
+          </a:lstStyle>
+          <a:p>
+            <a:endParaRPr lang="en-US"/>
+          </a:p>
+        </p:txBody>
+      </p:sp>
+      <p:sp>
+        <p:nvSpPr>
+          <p:cNvPr id="3" name="Date Placeholder 2"/>
+          <p:cNvSpPr>
+            <a:spLocks noGrp="1"/>
+          </p:cNvSpPr>
+          <p:nvPr>
+            <p:ph type="dt" idx="1"/>
+          </p:nvPr>
+        </p:nvSpPr>
+        <p:spPr>
+          <a:xfrm>
+            <a:off x="3884613" y="0"/>
+            <a:ext cx="2971800" cy="458788"/>
+          </a:xfrm>
+          <a:prstGeom prst="rect">
+            <a:avLst/>
+          </a:prstGeom>
+        </p:spPr>
+        <p:txBody>
+          <a:bodyPr vert="horz" lIns="91440" tIns="45720" rIns="91440" bIns="45720" rtlCol="0"/>
+          <a:lstStyle>
+            <a:lvl1pPr algn="r">
+              <a:defRPr sz="1200"/>
+            </a:lvl1pPr>
+          </a:lstStyle>
+          <a:p>
+            <a:fld id="{5282F153-3F37-0F45-9E97-73ACFA13230C}" type="datetimeFigureOut">
+              <a:rPr lang="en-US"/>
+              <a:t>7/23/19</a:t>
+            </a:fld>
+            <a:endParaRPr lang="en-US"/>
+          </a:p>
+        </p:txBody>
+      </p:sp>
+      <p:sp>
+        <p:nvSpPr>
+          <p:cNvPr id="4" name="Slide Image Placeholder 3"/>
+          <p:cNvSpPr>
+            <a:spLocks noGrp="1" noRot="1" noChangeAspect="1"/>
+          </p:cNvSpPr>
+          <p:nvPr>
+            <p:ph type="sldImg" idx="2"/>
+          </p:nvPr>
+        </p:nvSpPr>
+        <p:spPr>
+          <a:xfrm>
+            <a:off x="685800" y="1143000"/>
+            <a:ext cx="5486400" cy="3086100"/>
+          </a:xfrm>
+          <a:prstGeom prst="rect">
+            <a:avLst/>
+          </a:prstGeom>
+          <a:noFill/>
+          <a:ln w="12700">
+            <a:solidFill>
+              <a:prstClr val="black"/>
+            </a:solidFill>
+          </a:ln>
+        </p:spPr>
+        <p:txBody>
+          <a:bodyPr vert="horz" lIns="91440" tIns="45720" rIns="91440" bIns="45720" rtlCol="0" anchor="ctr"/>
+          <a:lstStyle/>
+          <a:p>
+            <a:endParaRPr lang="en-US"/>
+          </a:p>
+        </p:txBody>
+      </p:sp>
+      <p:sp>
+        <p:nvSpPr>
+          <p:cNvPr id="5" name="Notes Placeholder 4"/>
+          <p:cNvSpPr>
+            <a:spLocks noGrp="1"/>
+          </p:cNvSpPr>
+          <p:nvPr>
+            <p:ph type="body" sz="quarter" idx="3"/>
+          </p:nvPr>
+        </p:nvSpPr>
+        <p:spPr>
+          <a:xfrm>
+            <a:off x="685800" y="4400550"/>
+            <a:ext cx="5486400" cy="3600450"/>
+          </a:xfrm>
+          <a:prstGeom prst="rect">
+            <a:avLst/>
+          </a:prstGeom>
+        </p:spPr>
+        <p:txBody>
+          <a:bodyPr vert="horz" lIns="91440" tIns="45720" rIns="91440" bIns="45720" rtlCol="0"/>
+          <a:lstStyle/>
+          <a:p>
+            <a:pPr lvl="0"/>
+            <a:r>
+              <a:rPr lang="en-US"/>
+              <a:t>Click to edit Master text styles</a:t>
+            </a:r>
+          </a:p>
+          <a:p>
+            <a:pPr lvl="1"/>
+            <a:r>
+              <a:rPr lang="en-US"/>
+              <a:t>Second level</a:t>
+            </a:r>
+          </a:p>
+          <a:p>
+            <a:pPr lvl="2"/>
+            <a:r>
+              <a:rPr lang="en-US"/>
+              <a:t>Third level</a:t>
+            </a:r>
+          </a:p>
+          <a:p>
+            <a:pPr lvl="3"/>
+            <a:r>
+              <a:rPr lang="en-US"/>
+              <a:t>Fourth level</a:t>
+            </a:r>
+          </a:p>
+          <a:p>
+            <a:pPr lvl="4"/>
+            <a:r>
+              <a:rPr lang="en-US"/>
+              <a:t>Fifth level</a:t>
+            </a:r>
+          </a:p>
+        </p:txBody>
+      </p:sp>
+      <p:sp>
+        <p:nvSpPr>
+          <p:cNvPr id="6" name="Footer Placeholder 5"/>
+          <p:cNvSpPr>
+            <a:spLocks noGrp="1"/>
+          </p:cNvSpPr>
+          <p:nvPr>
+            <p:ph type="ftr" sz="quarter" idx="4"/>
+          </p:nvPr>
+        </p:nvSpPr>
+        <p:spPr>
+          <a:xfrm>
+            <a:off x="0" y="8685213"/>
+            <a:ext cx="2971800" cy="458787"/>
+          </a:xfrm>
+          <a:prstGeom prst="rect">
+            <a:avLst/>
+          </a:prstGeom>
+        </p:spPr>
+        <p:txBody>
+          <a:bodyPr vert="horz" lIns="91440" tIns="45720" rIns="91440" bIns="45720" rtlCol="0" anchor="b"/>
+          <a:lstStyle>
+            <a:lvl1pPr algn="l">
+              <a:defRPr sz="1200"/>
+            </a:lvl1pPr>
+          </a:lstStyle>
+          <a:p>
+            <a:endParaRPr lang="en-US"/>
+          </a:p>
+        </p:txBody>
+      </p:sp>
+      <p:sp>
+        <p:nvSpPr>
+          <p:cNvPr id="7" name="Slide Number Placeholder 6"/>
+          <p:cNvSpPr>
+            <a:spLocks noGrp="1"/>
+          </p:cNvSpPr>
+          <p:nvPr>
+            <p:ph type="sldNum" sz="quarter" idx="5"/>
+          </p:nvPr>
+        </p:nvSpPr>
+        <p:spPr>
+          <a:xfrm>
+            <a:off x="3884613" y="8685213"/>
+            <a:ext cx="2971800" cy="458787"/>
+          </a:xfrm>
+          <a:prstGeom prst="rect">
+            <a:avLst/>
+          </a:prstGeom>
+        </p:spPr>
+        <p:txBody>
+          <a:bodyPr vert="horz" lIns="91440" tIns="45720" rIns="91440" bIns="45720" rtlCol="0" anchor="b"/>
+          <a:lstStyle>
+            <a:lvl1pPr algn="r">
+              <a:defRPr sz="1200"/>
+            </a:lvl1pPr>
+          </a:lstStyle>
+          <a:p>
+            <a:fld id="{CE5E9CC1-C706-0F49-92D6-E571CC5EEA8F}" type="slidenum">
+              <a:rPr lang="en-US"/>
+              <a:t>‹#›</a:t>
+            </a:fld>
+            <a:endParaRPr lang="en-US"/>
+          </a:p>
+        </p:txBody>
+      </p:sp>
     </p:spTree>
     <p:extLst>
       <p:ext uri="{BB962C8B-B14F-4D97-AF65-F5344CB8AC3E}">
-        <p14:creationId xmlns:p14="http://schemas.microsoft.com/office/powerpoint/2010/main" val="1660016880"/>
+        <p14:creationId xmlns:p14="http://schemas.microsoft.com/office/powerpoint/2010/main" val="1024086991"/>
       </p:ext>
     </p:extLst>
   </p:cSld>
@@ -281,6 +500,10 @@
           <a:bodyPr/>
           <a:lstStyle/>
           <a:p>
+            <a:r>
+              <a:rPr lang="en-US" dirty="0"/>
+              <a:t/>
+            </a:r>
             <a:endParaRPr lang="en-US" dirty="0"/>
           </a:p>
         </p:txBody>
@@ -354,11 +577,6 @@
 <file path=ppt/slideMasters/slideMaster1.xml><?xml version="1.0" encoding="utf-8"?>
 <p:sldMaster xmlns:a="http://schemas.openxmlformats.org/drawingml/2006/main" xmlns:r="http://schemas.openxmlformats.org/officeDocument/2006/relationships" xmlns:p="http://schemas.openxmlformats.org/presentationml/2006/main">
   <p:cSld>
-    <p:bg>
-      <p:bgRef idx="1001">
-        <a:schemeClr val="bg1"/>
-      </p:bgRef>
-    </p:bg>
     <p:spTree>
       <p:nvGrpSpPr>
         <p:cNvPr id="1" name=""/>
@@ -641,7 +859,6 @@
         <a:solidFill>
           <a:srgbClr val="FFFFFF"/>
         </a:solidFill>
-        <a:effectLst/>
       </p:bgPr>
     </p:bg>
     <p:spTree>
@@ -679,11 +896,11 @@
           <a:bodyPr wrap="square" lIns="0" tIns="0" rIns="0" bIns="0" rtlCol="0" anchor="ctr"/>
           <a:lstStyle/>
           <a:p>
-            <a:pPr marL="0" indent="0">
+            <a:pPr indent="0" marL="0">
               <a:buNone/>
             </a:pPr>
             <a:r>
-              <a:rPr lang="en-US" sz="1300" b="1" kern="0" spc="200" dirty="0">
+              <a:rPr lang="en-US" sz="1300" b="1" spc="200" kern="0" dirty="0">
                 <a:solidFill>
                   <a:srgbClr val="2E8C93"/>
                 </a:solidFill>
@@ -718,7 +935,7 @@
           <a:bodyPr wrap="square" lIns="0" tIns="0" rIns="0" bIns="0" rtlCol="0" anchor="ctr"/>
           <a:lstStyle/>
           <a:p>
-            <a:pPr marL="0" indent="0">
+            <a:pPr indent="0" marL="0">
               <a:buNone/>
             </a:pPr>
             <a:r>
@@ -744,12 +961,12 @@
         </p:nvSpPr>
         <p:spPr>
           <a:xfrm>
-            <a:off x="640080" y="1600200"/>
-            <a:ext cx="10911535" cy="914400"/>
+            <a:off x="640080" y="1536192"/>
+            <a:ext cx="10911535" cy="1371600"/>
           </a:xfrm>
           <a:prstGeom prst="roundRect">
             <a:avLst>
-              <a:gd name="adj" fmla="val 8000"/>
+              <a:gd name="adj" fmla="val 5333"/>
             </a:avLst>
           </a:prstGeom>
           <a:solidFill>
@@ -757,13 +974,6 @@
           </a:solidFill>
           <a:ln/>
         </p:spPr>
-        <p:txBody>
-          <a:bodyPr/>
-          <a:lstStyle/>
-          <a:p>
-            <a:endParaRPr lang="en-US"/>
-          </a:p>
-        </p:txBody>
       </p:sp>
       <p:sp>
         <p:nvSpPr>
@@ -773,8 +983,8 @@
         </p:nvSpPr>
         <p:spPr>
           <a:xfrm>
-            <a:off x="640080" y="1600200"/>
-            <a:ext cx="10911535" cy="914400"/>
+            <a:off x="640080" y="1609344"/>
+            <a:ext cx="10911535" cy="384048"/>
           </a:xfrm>
           <a:prstGeom prst="rect">
             <a:avLst/>
@@ -783,14 +993,14 @@
           <a:ln/>
         </p:spPr>
         <p:txBody>
-          <a:bodyPr wrap="square" lIns="0" tIns="0" rIns="0" bIns="0" rtlCol="0" anchor="ctr"/>
+          <a:bodyPr wrap="square" lIns="0" tIns="0" rIns="0" bIns="0" rtlCol="0" anchor="b"/>
           <a:lstStyle/>
           <a:p>
-            <a:pPr marL="0" indent="0" algn="ctr">
+            <a:pPr algn="ctr" indent="0" marL="0">
               <a:buNone/>
             </a:pPr>
             <a:r>
-              <a:rPr lang="en-US" sz="2300" b="1" dirty="0">
+              <a:rPr lang="en-US" sz="1900" b="1" dirty="0">
                 <a:solidFill>
                   <a:srgbClr val="173A5E"/>
                 </a:solidFill>
@@ -800,44 +1010,107 @@
               </a:rPr>
               <a:t>H = J(X₁X₂+Y₁Y₂+Z₁Z₂) + b(Z₁+Z₂) + D(X₁Z₂−Z₁X₂)</a:t>
             </a:r>
-            <a:endParaRPr lang="en-US" sz="2300" dirty="0"/>
+            <a:endParaRPr lang="en-US" sz="1900" dirty="0"/>
+          </a:p>
+        </p:txBody>
+      </p:sp>
+      <p:sp>
+        <p:nvSpPr>
+          <p:cNvPr id="6" name="Text 4"/>
+          <p:cNvSpPr txBox="1"/>
+          <p:nvPr/>
+        </p:nvSpPr>
+        <p:spPr>
+          <a:xfrm>
+            <a:off x="640080" y="2011680"/>
+            <a:ext cx="10911535" cy="822960"/>
+          </a:xfrm>
+          <a:prstGeom prst="rect">
+            <a:avLst/>
+          </a:prstGeom>
+          <a:noFill/>
+          <a:ln/>
+        </p:spPr>
+        <p:txBody>
+          <a:bodyPr wrap="square" lIns="0" tIns="0" rIns="0" bIns="0" rtlCol="0" anchor="t"/>
+          <a:lstStyle/>
+          <a:p>
+            <a:pPr algn="ctr" indent="0" marL="0">
+              <a:buNone/>
+            </a:pPr>
+            <a:r>
+              <a:rPr lang="en-US" sz="1350" b="1" dirty="0">
+                <a:solidFill>
+                  <a:srgbClr val="173A5E"/>
+                </a:solidFill>
+                <a:latin typeface="Calibri" pitchFamily="34" charset="0"/>
+                <a:ea typeface="Calibri" pitchFamily="34" charset="-122"/>
+                <a:cs typeface="Calibri" pitchFamily="34" charset="-120"/>
+              </a:rPr>
+              <a:t>H = J(X₁X₂+Y₁Y₂+Z₁Z₂) + J'(X₂X₃+Y₂Y₃+Z₂Z₃+X₁X₃+Y₁Y₃+Z₁Z₃) + b(Z₁+Z₂+Z₃) + D·Σ⟨i,j⟩(XᵢZⱼ−ZᵢXⱼ)</a:t>
+            </a:r>
+            <a:endParaRPr lang="en-US" sz="1350" dirty="0"/>
           </a:p>
         </p:txBody>
       </p:sp>
       <p:pic>
         <p:nvPicPr>
-          <p:cNvPr id="6" name="Image 0" descr="/home/claude/deck/assets/preview_s5_modello.png"/>
+          <p:cNvPr id="7" name="Image 0" descr="/home/claude/deck/assets/preview_s5_modello_dimero.png">    </p:cNvPr>
           <p:cNvPicPr>
             <a:picLocks noChangeAspect="1"/>
           </p:cNvPicPr>
           <p:nvPr/>
         </p:nvPicPr>
         <p:blipFill>
-          <a:blip r:embed="rId3"/>
+          <a:blip r:embed="rId1"/>
           <a:stretch>
             <a:fillRect/>
           </a:stretch>
         </p:blipFill>
         <p:spPr>
           <a:xfrm>
-            <a:off x="822960" y="2788920"/>
-            <a:ext cx="4572000" cy="2910535"/>
+            <a:off x="1630604" y="3063240"/>
+            <a:ext cx="3291840" cy="2094807"/>
           </a:xfrm>
           <a:prstGeom prst="rect">
             <a:avLst/>
           </a:prstGeom>
         </p:spPr>
       </p:pic>
-      <p:sp>
-        <p:nvSpPr>
-          <p:cNvPr id="7" name="Text 4"/>
+      <p:pic>
+        <p:nvPicPr>
+          <p:cNvPr id="8" name="Image 1" descr="/home/claude/deck/assets/preview_s5_modello_trimero.png">    </p:cNvPr>
+          <p:cNvPicPr>
+            <a:picLocks noChangeAspect="1"/>
+          </p:cNvPicPr>
+          <p:nvPr/>
+        </p:nvPicPr>
+        <p:blipFill>
+          <a:blip r:embed="rId2"/>
+          <a:stretch>
+            <a:fillRect/>
+          </a:stretch>
+        </p:blipFill>
+        <p:spPr>
+          <a:xfrm>
+            <a:off x="7269251" y="3063240"/>
+            <a:ext cx="3291840" cy="2094807"/>
+          </a:xfrm>
+          <a:prstGeom prst="rect">
+            <a:avLst/>
+          </a:prstGeom>
+        </p:spPr>
+      </p:pic>
+      <p:sp>
+        <p:nvSpPr>
+          <p:cNvPr id="9" name="Text 5"/>
           <p:cNvSpPr txBox="1"/>
           <p:nvPr/>
         </p:nvSpPr>
         <p:spPr>
           <a:xfrm>
-            <a:off x="5943600" y="2880360"/>
-            <a:ext cx="5577840" cy="777240"/>
+            <a:off x="640080" y="5257800"/>
+            <a:ext cx="5272888" cy="274320"/>
           </a:xfrm>
           <a:prstGeom prst="rect">
             <a:avLst/>
@@ -849,12 +1122,12 @@
           <a:bodyPr wrap="square" lIns="0" tIns="0" rIns="0" bIns="0" rtlCol="0" anchor="ctr"/>
           <a:lstStyle/>
           <a:p>
-            <a:pPr marL="279400" indent="-279400">
+            <a:pPr marL="228600" indent="-228600">
               <a:buSzPct val="100000"/>
               <a:buChar char="■"/>
             </a:pPr>
             <a:r>
-              <a:rPr lang="en-US" sz="1800" dirty="0">
+              <a:rPr lang="en-US" sz="1250" dirty="0">
                 <a:solidFill>
                   <a:srgbClr val="16233A"/>
                 </a:solidFill>
@@ -864,20 +1137,20 @@
               </a:rPr>
               <a:t>Ogni spin 1/2 ↔ un qubit (mappatura diretta)</a:t>
             </a:r>
-            <a:endParaRPr lang="en-US" sz="1800" dirty="0"/>
-          </a:p>
-        </p:txBody>
-      </p:sp>
-      <p:sp>
-        <p:nvSpPr>
-          <p:cNvPr id="8" name="Text 5"/>
+            <a:endParaRPr lang="en-US" sz="1250" dirty="0"/>
+          </a:p>
+        </p:txBody>
+      </p:sp>
+      <p:sp>
+        <p:nvSpPr>
+          <p:cNvPr id="10" name="Text 6"/>
           <p:cNvSpPr txBox="1"/>
           <p:nvPr/>
         </p:nvSpPr>
         <p:spPr>
           <a:xfrm>
-            <a:off x="5943600" y="3721608"/>
-            <a:ext cx="5577840" cy="777240"/>
+            <a:off x="640080" y="5568696"/>
+            <a:ext cx="5272888" cy="274320"/>
           </a:xfrm>
           <a:prstGeom prst="rect">
             <a:avLst/>
@@ -889,12 +1162,12 @@
           <a:bodyPr wrap="square" lIns="0" tIns="0" rIns="0" bIns="0" rtlCol="0" anchor="ctr"/>
           <a:lstStyle/>
           <a:p>
-            <a:pPr marL="279400" indent="-279400">
+            <a:pPr marL="228600" indent="-228600">
               <a:buSzPct val="100000"/>
               <a:buChar char="■"/>
             </a:pPr>
             <a:r>
-              <a:rPr lang="en-US" sz="1800" dirty="0">
+              <a:rPr lang="en-US" sz="1250" dirty="0">
                 <a:solidFill>
                   <a:srgbClr val="16233A"/>
                 </a:solidFill>
@@ -904,20 +1177,20 @@
               </a:rPr>
               <a:t>J: scambio isotropo (Heisenberg)</a:t>
             </a:r>
-            <a:endParaRPr lang="en-US" sz="1800" dirty="0"/>
-          </a:p>
-        </p:txBody>
-      </p:sp>
-      <p:sp>
-        <p:nvSpPr>
-          <p:cNvPr id="9" name="Text 6"/>
+            <a:endParaRPr lang="en-US" sz="1250" dirty="0"/>
+          </a:p>
+        </p:txBody>
+      </p:sp>
+      <p:sp>
+        <p:nvSpPr>
+          <p:cNvPr id="11" name="Text 7"/>
           <p:cNvSpPr txBox="1"/>
           <p:nvPr/>
         </p:nvSpPr>
         <p:spPr>
           <a:xfrm>
-            <a:off x="5943600" y="4562856"/>
-            <a:ext cx="5577840" cy="777240"/>
+            <a:off x="640080" y="5879592"/>
+            <a:ext cx="5272888" cy="274320"/>
           </a:xfrm>
           <a:prstGeom prst="rect">
             <a:avLst/>
@@ -929,12 +1202,12 @@
           <a:bodyPr wrap="square" lIns="0" tIns="0" rIns="0" bIns="0" rtlCol="0" anchor="ctr"/>
           <a:lstStyle/>
           <a:p>
-            <a:pPr marL="279400" indent="-279400">
+            <a:pPr marL="228600" indent="-228600">
               <a:buSzPct val="100000"/>
               <a:buChar char="■"/>
             </a:pPr>
             <a:r>
-              <a:rPr lang="en-US" sz="1800" dirty="0">
+              <a:rPr lang="en-US" sz="1250" dirty="0">
                 <a:solidFill>
                   <a:srgbClr val="16233A"/>
                 </a:solidFill>
@@ -944,20 +1217,20 @@
               </a:rPr>
               <a:t>D: termine di Dzyaloshinskii–Moriya</a:t>
             </a:r>
-            <a:endParaRPr lang="en-US" sz="1800" dirty="0"/>
-          </a:p>
-        </p:txBody>
-      </p:sp>
-      <p:sp>
-        <p:nvSpPr>
-          <p:cNvPr id="10" name="Text 7"/>
+            <a:endParaRPr lang="en-US" sz="1250" dirty="0"/>
+          </a:p>
+        </p:txBody>
+      </p:sp>
+      <p:sp>
+        <p:nvSpPr>
+          <p:cNvPr id="12" name="Text 8"/>
           <p:cNvSpPr txBox="1"/>
           <p:nvPr/>
         </p:nvSpPr>
         <p:spPr>
           <a:xfrm>
-            <a:off x="5943600" y="5404104"/>
-            <a:ext cx="5577840" cy="777240"/>
+            <a:off x="640080" y="6190488"/>
+            <a:ext cx="5272888" cy="274320"/>
           </a:xfrm>
           <a:prstGeom prst="rect">
             <a:avLst/>
@@ -969,12 +1242,12 @@
           <a:bodyPr wrap="square" lIns="0" tIns="0" rIns="0" bIns="0" rtlCol="0" anchor="ctr"/>
           <a:lstStyle/>
           <a:p>
-            <a:pPr marL="279400" indent="-279400">
+            <a:pPr marL="228600" indent="-228600">
               <a:buSzPct val="100000"/>
               <a:buChar char="■"/>
             </a:pPr>
             <a:r>
-              <a:rPr lang="en-US" sz="1800" dirty="0">
+              <a:rPr lang="en-US" sz="1250" dirty="0">
                 <a:solidFill>
                   <a:srgbClr val="16233A"/>
                 </a:solidFill>
@@ -984,7 +1257,207 @@
               </a:rPr>
               <a:t>b: campo Zeeman lungo z</a:t>
             </a:r>
-            <a:endParaRPr lang="en-US" sz="1800" dirty="0"/>
+            <a:endParaRPr lang="en-US" sz="1250" dirty="0"/>
+          </a:p>
+        </p:txBody>
+      </p:sp>
+      <p:sp>
+        <p:nvSpPr>
+          <p:cNvPr id="13" name="Text 9"/>
+          <p:cNvSpPr txBox="1"/>
+          <p:nvPr/>
+        </p:nvSpPr>
+        <p:spPr>
+          <a:xfrm>
+            <a:off x="6278728" y="5257800"/>
+            <a:ext cx="5272888" cy="274320"/>
+          </a:xfrm>
+          <a:prstGeom prst="rect">
+            <a:avLst/>
+          </a:prstGeom>
+          <a:noFill/>
+          <a:ln/>
+        </p:spPr>
+        <p:txBody>
+          <a:bodyPr wrap="square" lIns="0" tIns="0" rIns="0" bIns="0" rtlCol="0" anchor="ctr"/>
+          <a:lstStyle/>
+          <a:p>
+            <a:pPr marL="228600" indent="-228600">
+              <a:buSzPct val="100000"/>
+              <a:buChar char="■"/>
+            </a:pPr>
+            <a:r>
+              <a:rPr lang="en-US" sz="1250" dirty="0">
+                <a:solidFill>
+                  <a:srgbClr val="16233A"/>
+                </a:solidFill>
+                <a:latin typeface="Calibri" pitchFamily="34" charset="0"/>
+                <a:ea typeface="Calibri" pitchFamily="34" charset="-122"/>
+                <a:cs typeface="Calibri" pitchFamily="34" charset="-120"/>
+              </a:rPr>
+              <a:t>Ogni spin 1/2 ↔ un qubit (come nel dimero)</a:t>
+            </a:r>
+            <a:endParaRPr lang="en-US" sz="1250" dirty="0"/>
+          </a:p>
+        </p:txBody>
+      </p:sp>
+      <p:sp>
+        <p:nvSpPr>
+          <p:cNvPr id="14" name="Text 10"/>
+          <p:cNvSpPr txBox="1"/>
+          <p:nvPr/>
+        </p:nvSpPr>
+        <p:spPr>
+          <a:xfrm>
+            <a:off x="6278728" y="5568696"/>
+            <a:ext cx="5272888" cy="274320"/>
+          </a:xfrm>
+          <a:prstGeom prst="rect">
+            <a:avLst/>
+          </a:prstGeom>
+          <a:noFill/>
+          <a:ln/>
+        </p:spPr>
+        <p:txBody>
+          <a:bodyPr wrap="square" lIns="0" tIns="0" rIns="0" bIns="0" rtlCol="0" anchor="ctr"/>
+          <a:lstStyle/>
+          <a:p>
+            <a:pPr marL="228600" indent="-228600">
+              <a:buSzPct val="100000"/>
+              <a:buChar char="■"/>
+            </a:pPr>
+            <a:r>
+              <a:rPr lang="en-US" sz="1250" dirty="0">
+                <a:solidFill>
+                  <a:srgbClr val="16233A"/>
+                </a:solidFill>
+                <a:latin typeface="Calibri" pitchFamily="34" charset="0"/>
+                <a:ea typeface="Calibri" pitchFamily="34" charset="-122"/>
+                <a:cs typeface="Calibri" pitchFamily="34" charset="-120"/>
+              </a:rPr>
+              <a:t>J, J': scambio isotropo — J su (1,2), J' su (2,3) e (3,1)</a:t>
+            </a:r>
+            <a:endParaRPr lang="en-US" sz="1250" dirty="0"/>
+          </a:p>
+        </p:txBody>
+      </p:sp>
+      <p:sp>
+        <p:nvSpPr>
+          <p:cNvPr id="15" name="Text 11"/>
+          <p:cNvSpPr txBox="1"/>
+          <p:nvPr/>
+        </p:nvSpPr>
+        <p:spPr>
+          <a:xfrm>
+            <a:off x="6278728" y="5879592"/>
+            <a:ext cx="5272888" cy="274320"/>
+          </a:xfrm>
+          <a:prstGeom prst="rect">
+            <a:avLst/>
+          </a:prstGeom>
+          <a:noFill/>
+          <a:ln/>
+        </p:spPr>
+        <p:txBody>
+          <a:bodyPr wrap="square" lIns="0" tIns="0" rIns="0" bIns="0" rtlCol="0" anchor="ctr"/>
+          <a:lstStyle/>
+          <a:p>
+            <a:pPr marL="228600" indent="-228600">
+              <a:buSzPct val="100000"/>
+              <a:buChar char="■"/>
+            </a:pPr>
+            <a:r>
+              <a:rPr lang="en-US" sz="1250" dirty="0">
+                <a:solidFill>
+                  <a:srgbClr val="16233A"/>
+                </a:solidFill>
+                <a:latin typeface="Calibri" pitchFamily="34" charset="0"/>
+                <a:ea typeface="Calibri" pitchFamily="34" charset="-122"/>
+                <a:cs typeface="Calibri" pitchFamily="34" charset="-120"/>
+              </a:rPr>
+              <a:t>D: termine di Dzyaloshinskii–Moriya</a:t>
+            </a:r>
+            <a:endParaRPr lang="en-US" sz="1250" dirty="0"/>
+          </a:p>
+        </p:txBody>
+      </p:sp>
+      <p:sp>
+        <p:nvSpPr>
+          <p:cNvPr id="16" name="Text 12"/>
+          <p:cNvSpPr txBox="1"/>
+          <p:nvPr/>
+        </p:nvSpPr>
+        <p:spPr>
+          <a:xfrm>
+            <a:off x="6278728" y="6190488"/>
+            <a:ext cx="5272888" cy="274320"/>
+          </a:xfrm>
+          <a:prstGeom prst="rect">
+            <a:avLst/>
+          </a:prstGeom>
+          <a:noFill/>
+          <a:ln/>
+        </p:spPr>
+        <p:txBody>
+          <a:bodyPr wrap="square" lIns="0" tIns="0" rIns="0" bIns="0" rtlCol="0" anchor="ctr"/>
+          <a:lstStyle/>
+          <a:p>
+            <a:pPr marL="228600" indent="-228600">
+              <a:buSzPct val="100000"/>
+              <a:buChar char="■"/>
+            </a:pPr>
+            <a:r>
+              <a:rPr lang="en-US" sz="1250" dirty="0">
+                <a:solidFill>
+                  <a:srgbClr val="16233A"/>
+                </a:solidFill>
+                <a:latin typeface="Calibri" pitchFamily="34" charset="0"/>
+                <a:ea typeface="Calibri" pitchFamily="34" charset="-122"/>
+                <a:cs typeface="Calibri" pitchFamily="34" charset="-120"/>
+              </a:rPr>
+              <a:t>b: campo Zeeman lungo z</a:t>
+            </a:r>
+            <a:endParaRPr lang="en-US" sz="1250" dirty="0"/>
+          </a:p>
+        </p:txBody>
+      </p:sp>
+      <p:sp>
+        <p:nvSpPr>
+          <p:cNvPr id="17" name="Text 13"/>
+          <p:cNvSpPr txBox="1"/>
+          <p:nvPr/>
+        </p:nvSpPr>
+        <p:spPr>
+          <a:xfrm>
+            <a:off x="6278728" y="6501384"/>
+            <a:ext cx="5272888" cy="274320"/>
+          </a:xfrm>
+          <a:prstGeom prst="rect">
+            <a:avLst/>
+          </a:prstGeom>
+          <a:noFill/>
+          <a:ln/>
+        </p:spPr>
+        <p:txBody>
+          <a:bodyPr wrap="square" lIns="0" tIns="0" rIns="0" bIns="0" rtlCol="0" anchor="ctr"/>
+          <a:lstStyle/>
+          <a:p>
+            <a:pPr marL="228600" indent="-228600">
+              <a:buSzPct val="100000"/>
+              <a:buChar char="■"/>
+            </a:pPr>
+            <a:r>
+              <a:rPr lang="en-US" sz="1250" dirty="0">
+                <a:solidFill>
+                  <a:srgbClr val="16233A"/>
+                </a:solidFill>
+                <a:latin typeface="Calibri" pitchFamily="34" charset="0"/>
+                <a:ea typeface="Calibri" pitchFamily="34" charset="-122"/>
+                <a:cs typeface="Calibri" pitchFamily="34" charset="-120"/>
+              </a:rPr>
+              <a:t>J' su (3,1) chiude il ciclo → frustrazione geometrica (assente nel dimero)</a:t>
+            </a:r>
+            <a:endParaRPr lang="en-US" sz="1250" dirty="0"/>
           </a:p>
         </p:txBody>
       </p:sp>
@@ -1292,319 +1765,4 @@
     </a:ext>
   </a:extLst>
 </a:theme>
-</file>
-
-<file path=ppt/theme/theme2.xml><?xml version="1.0" encoding="utf-8"?>
-<a:theme xmlns:a="http://schemas.openxmlformats.org/drawingml/2006/main" name="Office Theme">
-  <a:themeElements>
-    <a:clrScheme name="Office">
-      <a:dk1>
-        <a:sysClr val="windowText" lastClr="000000"/>
-      </a:dk1>
-      <a:lt1>
-        <a:sysClr val="window" lastClr="FFFFFF"/>
-      </a:lt1>
-      <a:dk2>
-        <a:srgbClr val="0E2841"/>
-      </a:dk2>
-      <a:lt2>
-        <a:srgbClr val="E8E8E8"/>
-      </a:lt2>
-      <a:accent1>
-        <a:srgbClr val="156082"/>
-      </a:accent1>
-      <a:accent2>
-        <a:srgbClr val="E97132"/>
-      </a:accent2>
-      <a:accent3>
-        <a:srgbClr val="196B24"/>
-      </a:accent3>
-      <a:accent4>
-        <a:srgbClr val="0F9ED5"/>
-      </a:accent4>
-      <a:accent5>
-        <a:srgbClr val="A02B93"/>
-      </a:accent5>
-      <a:accent6>
-        <a:srgbClr val="4EA72E"/>
-      </a:accent6>
-      <a:hlink>
-        <a:srgbClr val="467886"/>
-      </a:hlink>
-      <a:folHlink>
-        <a:srgbClr val="96607D"/>
-      </a:folHlink>
-    </a:clrScheme>
-    <a:fontScheme name="Office">
-      <a:majorFont>
-        <a:latin typeface="Aptos Display" panose="02110004020202020204"/>
-        <a:ea typeface=""/>
-        <a:cs typeface=""/>
-        <a:font script="Jpan" typeface="游ゴシック Light"/>
-        <a:font script="Hang" typeface="맑은 고딕"/>
-        <a:font script="Hans" typeface="等线 Light"/>
-        <a:font script="Hant" typeface="新細明體"/>
-        <a:font script="Arab" typeface="Times New Roman"/>
-        <a:font script="Hebr" typeface="Times New Roman"/>
-        <a:font script="Thai" typeface="Angsana New"/>
-        <a:font script="Ethi" typeface="Nyala"/>
-        <a:font script="Beng" typeface="Vrinda"/>
-        <a:font script="Gujr" typeface="Shruti"/>
-        <a:font script="Khmr" typeface="MoolBoran"/>
-        <a:font script="Knda" typeface="Tunga"/>
-        <a:font script="Guru" typeface="Raavi"/>
-        <a:font script="Cans" typeface="Euphemia"/>
-        <a:font script="Cher" typeface="Plantagenet Cherokee"/>
-        <a:font script="Yiii" typeface="Microsoft Yi Baiti"/>
-        <a:font script="Tibt" typeface="Microsoft Himalaya"/>
-        <a:font script="Thaa" typeface="MV Boli"/>
-        <a:font script="Deva" typeface="Mangal"/>
-        <a:font script="Telu" typeface="Gautami"/>
-        <a:font script="Taml" typeface="Latha"/>
-        <a:font script="Syrc" typeface="Estrangelo Edessa"/>
-        <a:font script="Orya" typeface="Kalinga"/>
-        <a:font script="Mlym" typeface="Kartika"/>
-        <a:font script="Laoo" typeface="DokChampa"/>
-        <a:font script="Sinh" typeface="Iskoola Pota"/>
-        <a:font script="Mong" typeface="Mongolian Baiti"/>
-        <a:font script="Viet" typeface="Times New Roman"/>
-        <a:font script="Uigh" typeface="Microsoft Uighur"/>
-        <a:font script="Geor" typeface="Sylfaen"/>
-        <a:font script="Armn" typeface="Arial"/>
-        <a:font script="Bugi" typeface="Leelawadee UI"/>
-        <a:font script="Bopo" typeface="Microsoft JhengHei"/>
-        <a:font script="Java" typeface="Javanese Text"/>
-        <a:font script="Lisu" typeface="Segoe UI"/>
-        <a:font script="Mymr" typeface="Myanmar Text"/>
-        <a:font script="Nkoo" typeface="Ebrima"/>
-        <a:font script="Olck" typeface="Nirmala UI"/>
-        <a:font script="Osma" typeface="Ebrima"/>
-        <a:font script="Phag" typeface="Phagspa"/>
-        <a:font script="Syrn" typeface="Estrangelo Edessa"/>
-        <a:font script="Syrj" typeface="Estrangelo Edessa"/>
-        <a:font script="Syre" typeface="Estrangelo Edessa"/>
-        <a:font script="Sora" typeface="Nirmala UI"/>
-        <a:font script="Tale" typeface="Microsoft Tai Le"/>
-        <a:font script="Talu" typeface="Microsoft New Tai Lue"/>
-        <a:font script="Tfng" typeface="Ebrima"/>
-      </a:majorFont>
-      <a:minorFont>
-        <a:latin typeface="Aptos" panose="02110004020202020204"/>
-        <a:ea typeface=""/>
-        <a:cs typeface=""/>
-        <a:font script="Jpan" typeface="游ゴシック"/>
-        <a:font script="Hang" typeface="맑은 고딕"/>
-        <a:font script="Hans" typeface="等线"/>
-        <a:font script="Hant" typeface="新細明體"/>
-        <a:font script="Arab" typeface="Arial"/>
-        <a:font script="Hebr" typeface="Arial"/>
-        <a:font script="Thai" typeface="Cordia New"/>
-        <a:font script="Ethi" typeface="Nyala"/>
-        <a:font script="Beng" typeface="Vrinda"/>
-        <a:font script="Gujr" typeface="Shruti"/>
-        <a:font script="Khmr" typeface="DaunPenh"/>
-        <a:font script="Knda" typeface="Tunga"/>
-        <a:font script="Guru" typeface="Raavi"/>
-        <a:font script="Cans" typeface="Euphemia"/>
-        <a:font script="Cher" typeface="Plantagenet Cherokee"/>
-        <a:font script="Yiii" typeface="Microsoft Yi Baiti"/>
-        <a:font script="Tibt" typeface="Microsoft Himalaya"/>
-        <a:font script="Thaa" typeface="MV Boli"/>
-        <a:font script="Deva" typeface="Mangal"/>
-        <a:font script="Telu" typeface="Gautami"/>
-        <a:font script="Taml" typeface="Latha"/>
-        <a:font script="Syrc" typeface="Estrangelo Edessa"/>
-        <a:font script="Orya" typeface="Kalinga"/>
-        <a:font script="Mlym" typeface="Kartika"/>
-        <a:font script="Laoo" typeface="DokChampa"/>
-        <a:font script="Sinh" typeface="Iskoola Pota"/>
-        <a:font script="Mong" typeface="Mongolian Baiti"/>
-        <a:font script="Viet" typeface="Arial"/>
-        <a:font script="Uigh" typeface="Microsoft Uighur"/>
-        <a:font script="Geor" typeface="Sylfaen"/>
-        <a:font script="Armn" typeface="Arial"/>
-        <a:font script="Bugi" typeface="Leelawadee UI"/>
-        <a:font script="Bopo" typeface="Microsoft JhengHei"/>
-        <a:font script="Java" typeface="Javanese Text"/>
-        <a:font script="Lisu" typeface="Segoe UI"/>
-        <a:font script="Mymr" typeface="Myanmar Text"/>
-        <a:font script="Nkoo" typeface="Ebrima"/>
-        <a:font script="Olck" typeface="Nirmala UI"/>
-        <a:font script="Osma" typeface="Ebrima"/>
-        <a:font script="Phag" typeface="Phagspa"/>
-        <a:font script="Syrn" typeface="Estrangelo Edessa"/>
-        <a:font script="Syrj" typeface="Estrangelo Edessa"/>
-        <a:font script="Syre" typeface="Estrangelo Edessa"/>
-        <a:font script="Sora" typeface="Nirmala UI"/>
-        <a:font script="Tale" typeface="Microsoft Tai Le"/>
-        <a:font script="Talu" typeface="Microsoft New Tai Lue"/>
-        <a:font script="Tfng" typeface="Ebrima"/>
-      </a:minorFont>
-    </a:fontScheme>
-    <a:fmtScheme name="Office">
-      <a:fillStyleLst>
-        <a:solidFill>
-          <a:schemeClr val="phClr"/>
-        </a:solidFill>
-        <a:gradFill rotWithShape="1">
-          <a:gsLst>
-            <a:gs pos="0">
-              <a:schemeClr val="phClr">
-                <a:lumMod val="110000"/>
-                <a:satMod val="105000"/>
-                <a:tint val="67000"/>
-              </a:schemeClr>
-            </a:gs>
-            <a:gs pos="50000">
-              <a:schemeClr val="phClr">
-                <a:lumMod val="105000"/>
-                <a:satMod val="103000"/>
-                <a:tint val="73000"/>
-              </a:schemeClr>
-            </a:gs>
-            <a:gs pos="100000">
-              <a:schemeClr val="phClr">
-                <a:lumMod val="105000"/>
-                <a:satMod val="109000"/>
-                <a:tint val="81000"/>
-              </a:schemeClr>
-            </a:gs>
-          </a:gsLst>
-          <a:lin ang="5400000" scaled="0"/>
-        </a:gradFill>
-        <a:gradFill rotWithShape="1">
-          <a:gsLst>
-            <a:gs pos="0">
-              <a:schemeClr val="phClr">
-                <a:satMod val="103000"/>
-                <a:lumMod val="102000"/>
-                <a:tint val="94000"/>
-              </a:schemeClr>
-            </a:gs>
-            <a:gs pos="50000">
-              <a:schemeClr val="phClr">
-                <a:satMod val="110000"/>
-                <a:lumMod val="100000"/>
-                <a:shade val="100000"/>
-              </a:schemeClr>
-            </a:gs>
-            <a:gs pos="100000">
-              <a:schemeClr val="phClr">
-                <a:lumMod val="99000"/>
-                <a:satMod val="120000"/>
-                <a:shade val="78000"/>
-              </a:schemeClr>
-            </a:gs>
-          </a:gsLst>
-          <a:lin ang="5400000" scaled="0"/>
-        </a:gradFill>
-      </a:fillStyleLst>
-      <a:lnStyleLst>
-        <a:ln w="12700" cap="flat" cmpd="sng" algn="ctr">
-          <a:solidFill>
-            <a:schemeClr val="phClr"/>
-          </a:solidFill>
-          <a:prstDash val="solid"/>
-          <a:miter lim="800000"/>
-        </a:ln>
-        <a:ln w="19050" cap="flat" cmpd="sng" algn="ctr">
-          <a:solidFill>
-            <a:schemeClr val="phClr"/>
-          </a:solidFill>
-          <a:prstDash val="solid"/>
-          <a:miter lim="800000"/>
-        </a:ln>
-        <a:ln w="25400" cap="flat" cmpd="sng" algn="ctr">
-          <a:solidFill>
-            <a:schemeClr val="phClr"/>
-          </a:solidFill>
-          <a:prstDash val="solid"/>
-          <a:miter lim="800000"/>
-        </a:ln>
-      </a:lnStyleLst>
-      <a:effectStyleLst>
-        <a:effectStyle>
-          <a:effectLst/>
-        </a:effectStyle>
-        <a:effectStyle>
-          <a:effectLst/>
-        </a:effectStyle>
-        <a:effectStyle>
-          <a:effectLst>
-            <a:outerShdw blurRad="57150" dist="19050" dir="5400000" algn="ctr" rotWithShape="0">
-              <a:srgbClr val="000000">
-                <a:alpha val="63000"/>
-              </a:srgbClr>
-            </a:outerShdw>
-          </a:effectLst>
-        </a:effectStyle>
-      </a:effectStyleLst>
-      <a:bgFillStyleLst>
-        <a:solidFill>
-          <a:schemeClr val="phClr"/>
-        </a:solidFill>
-        <a:solidFill>
-          <a:schemeClr val="phClr">
-            <a:tint val="95000"/>
-            <a:satMod val="170000"/>
-          </a:schemeClr>
-        </a:solidFill>
-        <a:gradFill rotWithShape="1">
-          <a:gsLst>
-            <a:gs pos="0">
-              <a:schemeClr val="phClr">
-                <a:tint val="93000"/>
-                <a:satMod val="150000"/>
-                <a:shade val="98000"/>
-                <a:lumMod val="102000"/>
-              </a:schemeClr>
-            </a:gs>
-            <a:gs pos="50000">
-              <a:schemeClr val="phClr">
-                <a:tint val="98000"/>
-                <a:satMod val="130000"/>
-                <a:shade val="90000"/>
-                <a:lumMod val="103000"/>
-              </a:schemeClr>
-            </a:gs>
-            <a:gs pos="100000">
-              <a:schemeClr val="phClr">
-                <a:shade val="63000"/>
-                <a:satMod val="120000"/>
-              </a:schemeClr>
-            </a:gs>
-          </a:gsLst>
-          <a:lin ang="5400000" scaled="0"/>
-        </a:gradFill>
-      </a:bgFillStyleLst>
-    </a:fmtScheme>
-  </a:themeElements>
-  <a:objectDefaults>
-    <a:lnDef>
-      <a:spPr/>
-      <a:bodyPr/>
-      <a:lstStyle/>
-      <a:style>
-        <a:lnRef idx="2">
-          <a:schemeClr val="accent1"/>
-        </a:lnRef>
-        <a:fillRef idx="0">
-          <a:schemeClr val="accent1"/>
-        </a:fillRef>
-        <a:effectRef idx="1">
-          <a:schemeClr val="accent1"/>
-        </a:effectRef>
-        <a:fontRef idx="minor">
-          <a:schemeClr val="tx1"/>
-        </a:fontRef>
-      </a:style>
-    </a:lnDef>
-  </a:objectDefaults>
-  <a:extraClrSchemeLst/>
-  <a:extLst>
-    <a:ext uri="{05A4C25C-085E-4340-85A3-A5531E510DB2}">
-      <thm15:themeFamily xmlns:thm15="http://schemas.microsoft.com/office/thememl/2012/main" name="Office Theme" id="{2E142A2C-CD16-42D6-873A-C26D2A0506FA}" vid="{1BDDFF52-6CD6-40A5-AB3C-68EB2F1E4D0A}"/>
-    </a:ext>
-  </a:extLst>
-</a:theme>
 </file>